--- a/PPT/Review-1.pptx
+++ b/PPT/Review-1.pptx
@@ -213,80 +213,27 @@
 </p:presentation>
 </file>
 
-<file path=ppt/revisionInfo.xml><?xml version="1.0" encoding="utf-8"?>
-<p1510:revInfo xmlns:a="http://schemas.openxmlformats.org/drawingml/2006/main" xmlns:r="http://schemas.openxmlformats.org/officeDocument/2006/relationships" xmlns:p1510="http://schemas.microsoft.com/office/powerpoint/2015/10/main">
-  <p1510:revLst>
-    <p1510:client id="{898A3CB8-F589-4FAA-BF99-08BBA30C1358}" v="10" dt="2025-12-22T14:56:56.367"/>
-  </p1510:revLst>
-</p1510:revInfo>
-</file>
-
 <file path=ppt/changesInfos/changesInfo1.xml><?xml version="1.0" encoding="utf-8"?>
 <pc:chgInfo xmlns:a="http://schemas.openxmlformats.org/drawingml/2006/main" xmlns:r="http://schemas.openxmlformats.org/officeDocument/2006/relationships" xmlns:ac="http://schemas.microsoft.com/office/drawing/2013/main/command" xmlns:pc="http://schemas.microsoft.com/office/powerpoint/2013/main/command">
   <pc:docChgLst>
-    <pc:chgData name="SANDEEP KUMAR REDDY TAVVA" userId="10a689a2c5b210cf" providerId="LiveId" clId="{F7CA484F-DC9C-467D-A897-77F417B2FB0F}"/>
-    <pc:docChg chg="addSld delSld modSld">
-      <pc:chgData name="SANDEEP KUMAR REDDY TAVVA" userId="10a689a2c5b210cf" providerId="LiveId" clId="{F7CA484F-DC9C-467D-A897-77F417B2FB0F}" dt="2025-12-22T14:56:56.367" v="30" actId="1076"/>
+    <pc:chgData name="SANDEEP KUMAR REDDY TAVVA" userId="10a689a2c5b210cf" providerId="LiveId" clId="{BA029B44-F033-462E-91A3-7CABCAE711FD}"/>
+    <pc:docChg chg="custSel modSld">
+      <pc:chgData name="SANDEEP KUMAR REDDY TAVVA" userId="10a689a2c5b210cf" providerId="LiveId" clId="{BA029B44-F033-462E-91A3-7CABCAE711FD}" dt="2026-06-01T16:30:48.613" v="36" actId="20577"/>
       <pc:docMkLst>
         <pc:docMk/>
       </pc:docMkLst>
-      <pc:sldChg chg="del">
-        <pc:chgData name="SANDEEP KUMAR REDDY TAVVA" userId="10a689a2c5b210cf" providerId="LiveId" clId="{F7CA484F-DC9C-467D-A897-77F417B2FB0F}" dt="2025-12-22T14:52:01.402" v="1" actId="47"/>
-        <pc:sldMkLst>
-          <pc:docMk/>
-          <pc:sldMk cId="3853256293" sldId="491"/>
-        </pc:sldMkLst>
-      </pc:sldChg>
-      <pc:sldChg chg="modSp add mod">
-        <pc:chgData name="SANDEEP KUMAR REDDY TAVVA" userId="10a689a2c5b210cf" providerId="LiveId" clId="{F7CA484F-DC9C-467D-A897-77F417B2FB0F}" dt="2025-12-22T14:52:06.756" v="2" actId="20577"/>
+      <pc:sldChg chg="modSp mod">
+        <pc:chgData name="SANDEEP KUMAR REDDY TAVVA" userId="10a689a2c5b210cf" providerId="LiveId" clId="{BA029B44-F033-462E-91A3-7CABCAE711FD}" dt="2026-06-01T16:30:48.613" v="36" actId="20577"/>
         <pc:sldMkLst>
           <pc:docMk/>
           <pc:sldMk cId="3615748509" sldId="575"/>
         </pc:sldMkLst>
         <pc:spChg chg="mod">
-          <ac:chgData name="SANDEEP KUMAR REDDY TAVVA" userId="10a689a2c5b210cf" providerId="LiveId" clId="{F7CA484F-DC9C-467D-A897-77F417B2FB0F}" dt="2025-12-22T14:52:06.756" v="2" actId="20577"/>
+          <ac:chgData name="SANDEEP KUMAR REDDY TAVVA" userId="10a689a2c5b210cf" providerId="LiveId" clId="{BA029B44-F033-462E-91A3-7CABCAE711FD}" dt="2026-06-01T16:30:48.613" v="36" actId="20577"/>
           <ac:spMkLst>
             <pc:docMk/>
             <pc:sldMk cId="3615748509" sldId="575"/>
-            <ac:spMk id="12" creationId="{8C1951C4-93AE-4DB7-B5EA-49D22832BBB9}"/>
-          </ac:spMkLst>
-        </pc:spChg>
-      </pc:sldChg>
-      <pc:sldChg chg="new del">
-        <pc:chgData name="SANDEEP KUMAR REDDY TAVVA" userId="10a689a2c5b210cf" providerId="LiveId" clId="{F7CA484F-DC9C-467D-A897-77F417B2FB0F}" dt="2025-12-22T14:53:46.460" v="5" actId="47"/>
-        <pc:sldMkLst>
-          <pc:docMk/>
-          <pc:sldMk cId="3357387676" sldId="576"/>
-        </pc:sldMkLst>
-      </pc:sldChg>
-      <pc:sldChg chg="addSp delSp modSp add mod">
-        <pc:chgData name="SANDEEP KUMAR REDDY TAVVA" userId="10a689a2c5b210cf" providerId="LiveId" clId="{F7CA484F-DC9C-467D-A897-77F417B2FB0F}" dt="2025-12-22T14:56:56.367" v="30" actId="1076"/>
-        <pc:sldMkLst>
-          <pc:docMk/>
-          <pc:sldMk cId="538983973" sldId="577"/>
-        </pc:sldMkLst>
-        <pc:spChg chg="del">
-          <ac:chgData name="SANDEEP KUMAR REDDY TAVVA" userId="10a689a2c5b210cf" providerId="LiveId" clId="{F7CA484F-DC9C-467D-A897-77F417B2FB0F}" dt="2025-12-22T14:53:57.943" v="16" actId="478"/>
-          <ac:spMkLst>
-            <pc:docMk/>
-            <pc:sldMk cId="538983973" sldId="577"/>
-            <ac:spMk id="3" creationId="{6B023AC7-43C1-80FA-13D3-E81A7AE6BF4A}"/>
-          </ac:spMkLst>
-        </pc:spChg>
-        <pc:spChg chg="add mod">
-          <ac:chgData name="SANDEEP KUMAR REDDY TAVVA" userId="10a689a2c5b210cf" providerId="LiveId" clId="{F7CA484F-DC9C-467D-A897-77F417B2FB0F}" dt="2025-12-22T14:56:56.367" v="30" actId="1076"/>
-          <ac:spMkLst>
-            <pc:docMk/>
-            <pc:sldMk cId="538983973" sldId="577"/>
-            <ac:spMk id="4" creationId="{FA965FBA-4182-C0A3-E960-8F7E4D614D7F}"/>
-          </ac:spMkLst>
-        </pc:spChg>
-        <pc:spChg chg="mod">
-          <ac:chgData name="SANDEEP KUMAR REDDY TAVVA" userId="10a689a2c5b210cf" providerId="LiveId" clId="{F7CA484F-DC9C-467D-A897-77F417B2FB0F}" dt="2025-12-22T14:53:52.361" v="15" actId="20577"/>
-          <ac:spMkLst>
-            <pc:docMk/>
-            <pc:sldMk cId="538983973" sldId="577"/>
-            <ac:spMk id="5" creationId="{B92B31F7-349E-D56A-1462-238199BD991D}"/>
+            <ac:spMk id="13" creationId="{174A5FDC-374E-4C44-807E-379B8C1A7C48}"/>
           </ac:spMkLst>
         </pc:spChg>
       </pc:sldChg>
@@ -2762,7 +2709,7 @@
           <a:p>
             <a:fld id="{1D8BD707-D9CF-40AE-B4C6-C98DA3205C09}" type="datetimeFigureOut">
               <a:rPr lang="en-US"/>
-              <a:t>12/22/2025</a:t>
+              <a:t>6/1/2026</a:t>
             </a:fld>
             <a:endParaRPr lang="en-US"/>
           </a:p>
@@ -5970,7 +5917,17 @@
                 <a:latin typeface="Times New Roman" panose="02020603050405020304" pitchFamily="18" charset="0"/>
                 <a:cs typeface="Times New Roman" panose="02020603050405020304" pitchFamily="18" charset="0"/>
               </a:rPr>
-              <a:t>AI Smart Attendance and Interactive Learning Ecosystem.</a:t>
+              <a:t>AI Smart Attendance and Interactive </a:t>
+            </a:r>
+            <a:r>
+              <a:rPr lang="en-GB" sz="2200" spc="-10">
+                <a:solidFill>
+                  <a:srgbClr val="FFFFFF"/>
+                </a:solidFill>
+                <a:latin typeface="Times New Roman" panose="02020603050405020304" pitchFamily="18" charset="0"/>
+                <a:cs typeface="Times New Roman" panose="02020603050405020304" pitchFamily="18" charset="0"/>
+              </a:rPr>
+              <a:t>Learning Ecosystem.</a:t>
             </a:r>
             <a:endParaRPr lang="en-US" sz="2200" spc="-10" dirty="0">
               <a:solidFill>
@@ -7413,8 +7370,8 @@
         </p:nvSpPr>
         <p:spPr bwMode="auto">
           <a:xfrm>
-            <a:off x="66039" y="1274679"/>
-            <a:ext cx="8508274" cy="3046988"/>
+            <a:off x="66039" y="1136180"/>
+            <a:ext cx="8508274" cy="3323987"/>
           </a:xfrm>
           <a:prstGeom prst="rect">
             <a:avLst/>
@@ -7479,7 +7436,7 @@
               <a:tabLst/>
             </a:pPr>
             <a:r>
-              <a:rPr kumimoji="0" lang="en-US" altLang="en-US" sz="1200" b="1" i="0" u="none" strike="noStrike" cap="none" normalizeH="0" baseline="0" dirty="0">
+              <a:rPr kumimoji="0" lang="en-US" altLang="en-US" sz="1400" b="1" i="0" u="none" strike="noStrike" cap="none" normalizeH="0" baseline="0" dirty="0">
                 <a:ln>
                   <a:noFill/>
                 </a:ln>
@@ -7495,7 +7452,7 @@
               <a:t>Ref 1:</a:t>
             </a:r>
             <a:r>
-              <a:rPr kumimoji="0" lang="en-US" altLang="en-US" sz="1200" b="0" i="0" u="none" strike="noStrike" cap="none" normalizeH="0" baseline="0" dirty="0">
+              <a:rPr kumimoji="0" lang="en-US" altLang="en-US" sz="1400" b="0" i="0" u="none" strike="noStrike" cap="none" normalizeH="0" baseline="0" dirty="0">
                 <a:ln>
                   <a:noFill/>
                 </a:ln>
@@ -7511,7 +7468,7 @@
               <a:t> Dani Hamdani, Ari </a:t>
             </a:r>
             <a:r>
-              <a:rPr kumimoji="0" lang="en-US" altLang="en-US" sz="1200" b="0" i="0" u="none" strike="noStrike" cap="none" normalizeH="0" baseline="0" dirty="0" err="1">
+              <a:rPr kumimoji="0" lang="en-US" altLang="en-US" sz="1400" b="0" i="0" u="none" strike="noStrike" cap="none" normalizeH="0" baseline="0" dirty="0" err="1">
                 <a:ln>
                   <a:noFill/>
                 </a:ln>
@@ -7527,7 +7484,7 @@
               <a:t>Purno</a:t>
             </a:r>
             <a:r>
-              <a:rPr kumimoji="0" lang="en-US" altLang="en-US" sz="1200" b="0" i="0" u="none" strike="noStrike" cap="none" normalizeH="0" baseline="0" dirty="0">
+              <a:rPr kumimoji="0" lang="en-US" altLang="en-US" sz="1400" b="0" i="0" u="none" strike="noStrike" cap="none" normalizeH="0" baseline="0" dirty="0">
                 <a:ln>
                   <a:noFill/>
                 </a:ln>
@@ -7543,7 +7500,7 @@
               <a:t> Wahyu Wibowo, Heri </a:t>
             </a:r>
             <a:r>
-              <a:rPr kumimoji="0" lang="en-US" altLang="en-US" sz="1200" b="0" i="0" u="none" strike="noStrike" cap="none" normalizeH="0" baseline="0" dirty="0" err="1">
+              <a:rPr kumimoji="0" lang="en-US" altLang="en-US" sz="1400" b="0" i="0" u="none" strike="noStrike" cap="none" normalizeH="0" baseline="0" dirty="0" err="1">
                 <a:ln>
                   <a:noFill/>
                 </a:ln>
@@ -7559,7 +7516,7 @@
               <a:t>Heryono</a:t>
             </a:r>
             <a:r>
-              <a:rPr kumimoji="0" lang="en-US" altLang="en-US" sz="1200" b="0" i="0" u="none" strike="noStrike" cap="none" normalizeH="0" baseline="0" dirty="0">
+              <a:rPr kumimoji="0" lang="en-US" altLang="en-US" sz="1400" b="0" i="0" u="none" strike="noStrike" cap="none" normalizeH="0" baseline="0" dirty="0">
                 <a:ln>
                   <a:noFill/>
                 </a:ln>
@@ -7575,7 +7532,7 @@
               <a:t>. "Evaluating QR Code-Based Attendance System Using User Experience." </a:t>
             </a:r>
             <a:r>
-              <a:rPr kumimoji="0" lang="en-US" altLang="en-US" sz="1200" b="0" i="1" u="none" strike="noStrike" cap="none" normalizeH="0" baseline="0" dirty="0">
+              <a:rPr kumimoji="0" lang="en-US" altLang="en-US" sz="1400" b="0" i="1" u="none" strike="noStrike" cap="none" normalizeH="0" baseline="0" dirty="0">
                 <a:ln>
                   <a:noFill/>
                 </a:ln>
@@ -7591,7 +7548,7 @@
               <a:t>Applied Information System and Management (AISM)</a:t>
             </a:r>
             <a:r>
-              <a:rPr kumimoji="0" lang="en-US" altLang="en-US" sz="1200" b="0" i="0" u="none" strike="noStrike" cap="none" normalizeH="0" baseline="0" dirty="0">
+              <a:rPr kumimoji="0" lang="en-US" altLang="en-US" sz="1400" b="0" i="0" u="none" strike="noStrike" cap="none" normalizeH="0" baseline="0" dirty="0">
                 <a:ln>
                   <a:noFill/>
                 </a:ln>
@@ -7625,7 +7582,7 @@
               <a:tabLst/>
             </a:pPr>
             <a:r>
-              <a:rPr kumimoji="0" lang="en-US" altLang="en-US" sz="1200" b="1" i="0" u="none" strike="noStrike" cap="none" normalizeH="0" baseline="0" dirty="0">
+              <a:rPr kumimoji="0" lang="en-US" altLang="en-US" sz="1400" b="1" i="0" u="none" strike="noStrike" cap="none" normalizeH="0" baseline="0" dirty="0">
                 <a:ln>
                   <a:noFill/>
                 </a:ln>
@@ -7641,7 +7598,7 @@
               <a:t>Ref 2:</a:t>
             </a:r>
             <a:r>
-              <a:rPr kumimoji="0" lang="en-US" altLang="en-US" sz="1200" b="0" i="0" u="none" strike="noStrike" cap="none" normalizeH="0" baseline="0" dirty="0">
+              <a:rPr kumimoji="0" lang="en-US" altLang="en-US" sz="1400" b="0" i="0" u="none" strike="noStrike" cap="none" normalizeH="0" baseline="0" dirty="0">
                 <a:ln>
                   <a:noFill/>
                 </a:ln>
@@ -7657,7 +7614,7 @@
               <a:t> Rajvardhan </a:t>
             </a:r>
             <a:r>
-              <a:rPr kumimoji="0" lang="en-US" altLang="en-US" sz="1200" b="0" i="0" u="none" strike="noStrike" cap="none" normalizeH="0" baseline="0" dirty="0" err="1">
+              <a:rPr kumimoji="0" lang="en-US" altLang="en-US" sz="1400" b="0" i="0" u="none" strike="noStrike" cap="none" normalizeH="0" baseline="0" dirty="0" err="1">
                 <a:ln>
                   <a:noFill/>
                 </a:ln>
@@ -7673,7 +7630,7 @@
               <a:t>Golande</a:t>
             </a:r>
             <a:r>
-              <a:rPr kumimoji="0" lang="en-US" altLang="en-US" sz="1200" b="0" i="0" u="none" strike="noStrike" cap="none" normalizeH="0" baseline="0" dirty="0">
+              <a:rPr kumimoji="0" lang="en-US" altLang="en-US" sz="1400" b="0" i="0" u="none" strike="noStrike" cap="none" normalizeH="0" baseline="0" dirty="0">
                 <a:ln>
                   <a:noFill/>
                 </a:ln>
@@ -7689,7 +7646,7 @@
               <a:t>, Pratik </a:t>
             </a:r>
             <a:r>
-              <a:rPr kumimoji="0" lang="en-US" altLang="en-US" sz="1200" b="0" i="0" u="none" strike="noStrike" cap="none" normalizeH="0" baseline="0" dirty="0" err="1">
+              <a:rPr kumimoji="0" lang="en-US" altLang="en-US" sz="1400" b="0" i="0" u="none" strike="noStrike" cap="none" normalizeH="0" baseline="0" dirty="0" err="1">
                 <a:ln>
                   <a:noFill/>
                 </a:ln>
@@ -7705,7 +7662,7 @@
               <a:t>Kokate</a:t>
             </a:r>
             <a:r>
-              <a:rPr kumimoji="0" lang="en-US" altLang="en-US" sz="1200" b="0" i="0" u="none" strike="noStrike" cap="none" normalizeH="0" baseline="0" dirty="0">
+              <a:rPr kumimoji="0" lang="en-US" altLang="en-US" sz="1400" b="0" i="0" u="none" strike="noStrike" cap="none" normalizeH="0" baseline="0" dirty="0">
                 <a:ln>
                   <a:noFill/>
                 </a:ln>
@@ -7721,7 +7678,7 @@
               <a:t>, Atish Jangle, Vaibhav Ghadge, Aditya Thorat, Prem Yeole. "Student Management System with Admin, Teacher, and Student Roles." </a:t>
             </a:r>
             <a:r>
-              <a:rPr kumimoji="0" lang="en-US" altLang="en-US" sz="1200" b="0" i="1" u="none" strike="noStrike" cap="none" normalizeH="0" baseline="0" dirty="0" err="1">
+              <a:rPr kumimoji="0" lang="en-US" altLang="en-US" sz="1400" b="0" i="1" u="none" strike="noStrike" cap="none" normalizeH="0" baseline="0" dirty="0" err="1">
                 <a:ln>
                   <a:noFill/>
                 </a:ln>
@@ -7737,7 +7694,7 @@
               <a:t>Alochana</a:t>
             </a:r>
             <a:r>
-              <a:rPr kumimoji="0" lang="en-US" altLang="en-US" sz="1200" b="0" i="1" u="none" strike="noStrike" cap="none" normalizeH="0" baseline="0" dirty="0">
+              <a:rPr kumimoji="0" lang="en-US" altLang="en-US" sz="1400" b="0" i="1" u="none" strike="noStrike" cap="none" normalizeH="0" baseline="0" dirty="0">
                 <a:ln>
                   <a:noFill/>
                 </a:ln>
@@ -7753,7 +7710,7 @@
               <a:t> Journal</a:t>
             </a:r>
             <a:r>
-              <a:rPr kumimoji="0" lang="en-US" altLang="en-US" sz="1200" b="0" i="0" u="none" strike="noStrike" cap="none" normalizeH="0" baseline="0" dirty="0">
+              <a:rPr kumimoji="0" lang="en-US" altLang="en-US" sz="1400" b="0" i="0" u="none" strike="noStrike" cap="none" normalizeH="0" baseline="0" dirty="0">
                 <a:ln>
                   <a:noFill/>
                 </a:ln>
@@ -7787,7 +7744,7 @@
               <a:tabLst/>
             </a:pPr>
             <a:r>
-              <a:rPr kumimoji="0" lang="en-US" altLang="en-US" sz="1200" b="1" i="0" u="none" strike="noStrike" cap="none" normalizeH="0" baseline="0" dirty="0">
+              <a:rPr kumimoji="0" lang="en-US" altLang="en-US" sz="1400" b="1" i="0" u="none" strike="noStrike" cap="none" normalizeH="0" baseline="0" dirty="0">
                 <a:ln>
                   <a:noFill/>
                 </a:ln>
@@ -7803,7 +7760,7 @@
               <a:t>Ref 3:</a:t>
             </a:r>
             <a:r>
-              <a:rPr kumimoji="0" lang="en-US" altLang="en-US" sz="1200" b="0" i="0" u="none" strike="noStrike" cap="none" normalizeH="0" baseline="0" dirty="0">
+              <a:rPr kumimoji="0" lang="en-US" altLang="en-US" sz="1400" b="0" i="0" u="none" strike="noStrike" cap="none" normalizeH="0" baseline="0" dirty="0">
                 <a:ln>
                   <a:noFill/>
                 </a:ln>
@@ -7819,7 +7776,7 @@
               <a:t> Shuang Yu, </a:t>
             </a:r>
             <a:r>
-              <a:rPr kumimoji="0" lang="en-US" altLang="en-US" sz="1200" b="0" i="0" u="none" strike="noStrike" cap="none" normalizeH="0" baseline="0" dirty="0" err="1">
+              <a:rPr kumimoji="0" lang="en-US" altLang="en-US" sz="1400" b="0" i="0" u="none" strike="noStrike" cap="none" normalizeH="0" baseline="0" dirty="0" err="1">
                 <a:ln>
                   <a:noFill/>
                 </a:ln>
@@ -7835,7 +7792,7 @@
               <a:t>Junmin</a:t>
             </a:r>
             <a:r>
-              <a:rPr kumimoji="0" lang="en-US" altLang="en-US" sz="1200" b="0" i="0" u="none" strike="noStrike" cap="none" normalizeH="0" baseline="0" dirty="0">
+              <a:rPr kumimoji="0" lang="en-US" altLang="en-US" sz="1400" b="0" i="0" u="none" strike="noStrike" cap="none" normalizeH="0" baseline="0" dirty="0">
                 <a:ln>
                   <a:noFill/>
                 </a:ln>
@@ -7851,7 +7808,7 @@
               <a:t> Ye, </a:t>
             </a:r>
             <a:r>
-              <a:rPr kumimoji="0" lang="en-US" altLang="en-US" sz="1200" b="0" i="0" u="none" strike="noStrike" cap="none" normalizeH="0" baseline="0" dirty="0" err="1">
+              <a:rPr kumimoji="0" lang="en-US" altLang="en-US" sz="1400" b="0" i="0" u="none" strike="noStrike" cap="none" normalizeH="0" baseline="0" dirty="0" err="1">
                 <a:ln>
                   <a:noFill/>
                 </a:ln>
@@ -7867,7 +7824,7 @@
               <a:t>Xinghan</a:t>
             </a:r>
             <a:r>
-              <a:rPr kumimoji="0" lang="en-US" altLang="en-US" sz="1200" b="0" i="0" u="none" strike="noStrike" cap="none" normalizeH="0" baseline="0" dirty="0">
+              <a:rPr kumimoji="0" lang="en-US" altLang="en-US" sz="1400" b="0" i="0" u="none" strike="noStrike" cap="none" normalizeH="0" baseline="0" dirty="0">
                 <a:ln>
                   <a:noFill/>
                 </a:ln>
@@ -7883,7 +7840,7 @@
               <a:t> Yin, </a:t>
             </a:r>
             <a:r>
-              <a:rPr kumimoji="0" lang="en-US" altLang="en-US" sz="1200" b="0" i="0" u="none" strike="noStrike" cap="none" normalizeH="0" baseline="0" dirty="0" err="1">
+              <a:rPr kumimoji="0" lang="en-US" altLang="en-US" sz="1400" b="0" i="0" u="none" strike="noStrike" cap="none" normalizeH="0" baseline="0" dirty="0" err="1">
                 <a:ln>
                   <a:noFill/>
                 </a:ln>
@@ -7899,7 +7856,7 @@
               <a:t>Linjing</a:t>
             </a:r>
             <a:r>
-              <a:rPr kumimoji="0" lang="en-US" altLang="en-US" sz="1200" b="0" i="0" u="none" strike="noStrike" cap="none" normalizeH="0" baseline="0" dirty="0">
+              <a:rPr kumimoji="0" lang="en-US" altLang="en-US" sz="1400" b="0" i="0" u="none" strike="noStrike" cap="none" normalizeH="0" baseline="0" dirty="0">
                 <a:ln>
                   <a:noFill/>
                 </a:ln>
@@ -7915,7 +7872,7 @@
               <a:t> Wu, </a:t>
             </a:r>
             <a:r>
-              <a:rPr kumimoji="0" lang="en-US" altLang="en-US" sz="1200" b="0" i="0" u="none" strike="noStrike" cap="none" normalizeH="0" baseline="0" dirty="0" err="1">
+              <a:rPr kumimoji="0" lang="en-US" altLang="en-US" sz="1400" b="0" i="0" u="none" strike="noStrike" cap="none" normalizeH="0" baseline="0" dirty="0" err="1">
                 <a:ln>
                   <a:noFill/>
                 </a:ln>
@@ -7931,7 +7888,7 @@
               <a:t>Shufan</a:t>
             </a:r>
             <a:r>
-              <a:rPr kumimoji="0" lang="en-US" altLang="en-US" sz="1200" b="0" i="0" u="none" strike="noStrike" cap="none" normalizeH="0" baseline="0" dirty="0">
+              <a:rPr kumimoji="0" lang="en-US" altLang="en-US" sz="1400" b="0" i="0" u="none" strike="noStrike" cap="none" normalizeH="0" baseline="0" dirty="0">
                 <a:ln>
                   <a:noFill/>
                 </a:ln>
@@ -7947,7 +7904,7 @@
               <a:t> Yu, </a:t>
             </a:r>
             <a:r>
-              <a:rPr kumimoji="0" lang="en-US" altLang="en-US" sz="1200" b="0" i="0" u="none" strike="noStrike" cap="none" normalizeH="0" baseline="0" dirty="0" err="1">
+              <a:rPr kumimoji="0" lang="en-US" altLang="en-US" sz="1400" b="0" i="0" u="none" strike="noStrike" cap="none" normalizeH="0" baseline="0" dirty="0" err="1">
                 <a:ln>
                   <a:noFill/>
                 </a:ln>
@@ -7963,7 +7920,7 @@
               <a:t>Mengting</a:t>
             </a:r>
             <a:r>
-              <a:rPr kumimoji="0" lang="en-US" altLang="en-US" sz="1200" b="0" i="0" u="none" strike="noStrike" cap="none" normalizeH="0" baseline="0" dirty="0">
+              <a:rPr kumimoji="0" lang="en-US" altLang="en-US" sz="1400" b="0" i="0" u="none" strike="noStrike" cap="none" normalizeH="0" baseline="0" dirty="0">
                 <a:ln>
                   <a:noFill/>
                 </a:ln>
@@ -7979,7 +7936,7 @@
               <a:t> Nan, Sheng Luo. "A learning analytics-based leaderboard feedback approach for promoting student cognitive engagement and learning performance in online collaborative learning." </a:t>
             </a:r>
             <a:r>
-              <a:rPr kumimoji="0" lang="en-US" altLang="en-US" sz="1200" b="0" i="1" u="none" strike="noStrike" cap="none" normalizeH="0" baseline="0" dirty="0">
+              <a:rPr kumimoji="0" lang="en-US" altLang="en-US" sz="1400" b="0" i="1" u="none" strike="noStrike" cap="none" normalizeH="0" baseline="0" dirty="0">
                 <a:ln>
                   <a:noFill/>
                 </a:ln>
@@ -7995,7 +7952,7 @@
               <a:t>British Journal of Educational Technology</a:t>
             </a:r>
             <a:r>
-              <a:rPr kumimoji="0" lang="en-US" altLang="en-US" sz="1200" b="0" i="0" u="none" strike="noStrike" cap="none" normalizeH="0" baseline="0" dirty="0">
+              <a:rPr kumimoji="0" lang="en-US" altLang="en-US" sz="1400" b="0" i="0" u="none" strike="noStrike" cap="none" normalizeH="0" baseline="0" dirty="0">
                 <a:ln>
                   <a:noFill/>
                 </a:ln>
@@ -8029,7 +7986,7 @@
               <a:tabLst/>
             </a:pPr>
             <a:r>
-              <a:rPr kumimoji="0" lang="en-US" altLang="en-US" sz="1200" b="1" i="0" u="none" strike="noStrike" cap="none" normalizeH="0" baseline="0" dirty="0">
+              <a:rPr kumimoji="0" lang="en-US" altLang="en-US" sz="1400" b="1" i="0" u="none" strike="noStrike" cap="none" normalizeH="0" baseline="0" dirty="0">
                 <a:ln>
                   <a:noFill/>
                 </a:ln>
@@ -8045,7 +8002,7 @@
               <a:t>Ref 4:</a:t>
             </a:r>
             <a:r>
-              <a:rPr kumimoji="0" lang="en-US" altLang="en-US" sz="1200" b="0" i="0" u="none" strike="noStrike" cap="none" normalizeH="0" baseline="0" dirty="0">
+              <a:rPr kumimoji="0" lang="en-US" altLang="en-US" sz="1400" b="0" i="0" u="none" strike="noStrike" cap="none" normalizeH="0" baseline="0" dirty="0">
                 <a:ln>
                   <a:noFill/>
                 </a:ln>
@@ -8061,7 +8018,7 @@
               <a:t> Noor Aldeen A. Khalid. "Develop a new Student Attendance System Using QR Code for Smartphones." </a:t>
             </a:r>
             <a:r>
-              <a:rPr kumimoji="0" lang="en-US" altLang="en-US" sz="1200" b="0" i="1" u="none" strike="noStrike" cap="none" normalizeH="0" baseline="0" dirty="0">
+              <a:rPr kumimoji="0" lang="en-US" altLang="en-US" sz="1400" b="0" i="1" u="none" strike="noStrike" cap="none" normalizeH="0" baseline="0" dirty="0">
                 <a:ln>
                   <a:noFill/>
                 </a:ln>
@@ -8077,7 +8034,7 @@
               <a:t>CESSMUDS</a:t>
             </a:r>
             <a:r>
-              <a:rPr kumimoji="0" lang="en-US" altLang="en-US" sz="1200" b="0" i="0" u="none" strike="noStrike" cap="none" normalizeH="0" baseline="0" dirty="0">
+              <a:rPr kumimoji="0" lang="en-US" altLang="en-US" sz="1400" b="0" i="0" u="none" strike="noStrike" cap="none" normalizeH="0" baseline="0" dirty="0">
                 <a:ln>
                   <a:noFill/>
                 </a:ln>
@@ -8111,7 +8068,7 @@
               <a:tabLst/>
             </a:pPr>
             <a:r>
-              <a:rPr kumimoji="0" lang="en-US" altLang="en-US" sz="1200" b="1" i="0" u="none" strike="noStrike" cap="none" normalizeH="0" baseline="0" dirty="0">
+              <a:rPr kumimoji="0" lang="en-US" altLang="en-US" sz="1400" b="1" i="0" u="none" strike="noStrike" cap="none" normalizeH="0" baseline="0" dirty="0">
                 <a:ln>
                   <a:noFill/>
                 </a:ln>
@@ -8127,7 +8084,7 @@
               <a:t>Ref 5:</a:t>
             </a:r>
             <a:r>
-              <a:rPr kumimoji="0" lang="en-US" altLang="en-US" sz="1200" b="0" i="0" u="none" strike="noStrike" cap="none" normalizeH="0" baseline="0" dirty="0">
+              <a:rPr kumimoji="0" lang="en-US" altLang="en-US" sz="1400" b="0" i="0" u="none" strike="noStrike" cap="none" normalizeH="0" baseline="0" dirty="0">
                 <a:ln>
                   <a:noFill/>
                 </a:ln>
@@ -8143,7 +8100,7 @@
               <a:t> </a:t>
             </a:r>
             <a:r>
-              <a:rPr kumimoji="0" lang="en-US" altLang="en-US" sz="1200" b="0" i="0" u="none" strike="noStrike" cap="none" normalizeH="0" baseline="0" dirty="0" err="1">
+              <a:rPr kumimoji="0" lang="en-US" altLang="en-US" sz="1400" b="0" i="0" u="none" strike="noStrike" cap="none" normalizeH="0" baseline="0" dirty="0" err="1">
                 <a:ln>
                   <a:noFill/>
                 </a:ln>
@@ -8159,7 +8116,7 @@
               <a:t>Shirole</a:t>
             </a:r>
             <a:r>
-              <a:rPr kumimoji="0" lang="en-US" altLang="en-US" sz="1200" b="0" i="0" u="none" strike="noStrike" cap="none" normalizeH="0" baseline="0" dirty="0">
+              <a:rPr kumimoji="0" lang="en-US" altLang="en-US" sz="1400" b="0" i="0" u="none" strike="noStrike" cap="none" normalizeH="0" baseline="0" dirty="0">
                 <a:ln>
                   <a:noFill/>
                 </a:ln>
@@ -8175,7 +8132,7 @@
               <a:t> Prajwal, </a:t>
             </a:r>
             <a:r>
-              <a:rPr kumimoji="0" lang="en-US" altLang="en-US" sz="1200" b="0" i="0" u="none" strike="noStrike" cap="none" normalizeH="0" baseline="0" dirty="0" err="1">
+              <a:rPr kumimoji="0" lang="en-US" altLang="en-US" sz="1400" b="0" i="0" u="none" strike="noStrike" cap="none" normalizeH="0" baseline="0" dirty="0" err="1">
                 <a:ln>
                   <a:noFill/>
                 </a:ln>
@@ -8191,7 +8148,7 @@
               <a:t>Pingat</a:t>
             </a:r>
             <a:r>
-              <a:rPr kumimoji="0" lang="en-US" altLang="en-US" sz="1200" b="0" i="0" u="none" strike="noStrike" cap="none" normalizeH="0" baseline="0" dirty="0">
+              <a:rPr kumimoji="0" lang="en-US" altLang="en-US" sz="1400" b="0" i="0" u="none" strike="noStrike" cap="none" normalizeH="0" baseline="0" dirty="0">
                 <a:ln>
                   <a:noFill/>
                 </a:ln>
@@ -8207,7 +8164,7 @@
               <a:t> Tejas, Jagdale Sarthak, Jori Ritesh, Prof. Thorat S.K. "QR Code-Based Student Attendance System." </a:t>
             </a:r>
             <a:r>
-              <a:rPr kumimoji="0" lang="en-US" altLang="en-US" sz="1200" b="0" i="1" u="none" strike="noStrike" cap="none" normalizeH="0" baseline="0" dirty="0">
+              <a:rPr kumimoji="0" lang="en-US" altLang="en-US" sz="1400" b="0" i="1" u="none" strike="noStrike" cap="none" normalizeH="0" baseline="0" dirty="0">
                 <a:ln>
                   <a:noFill/>
                 </a:ln>
@@ -8223,7 +8180,7 @@
               <a:t>International Journal of Advanced Research in Computer and Communication Engineering (IJARCCE)</a:t>
             </a:r>
             <a:r>
-              <a:rPr kumimoji="0" lang="en-US" altLang="en-US" sz="1200" b="0" i="0" u="none" strike="noStrike" cap="none" normalizeH="0" baseline="0" dirty="0">
+              <a:rPr kumimoji="0" lang="en-US" altLang="en-US" sz="1400" b="0" i="0" u="none" strike="noStrike" cap="none" normalizeH="0" baseline="0" dirty="0">
                 <a:ln>
                   <a:noFill/>
                 </a:ln>
@@ -8257,7 +8214,7 @@
               <a:tabLst/>
             </a:pPr>
             <a:r>
-              <a:rPr kumimoji="0" lang="en-US" altLang="en-US" sz="1200" b="1" i="0" u="none" strike="noStrike" cap="none" normalizeH="0" baseline="0" dirty="0">
+              <a:rPr kumimoji="0" lang="en-US" altLang="en-US" sz="1400" b="1" i="0" u="none" strike="noStrike" cap="none" normalizeH="0" baseline="0" dirty="0">
                 <a:ln>
                   <a:noFill/>
                 </a:ln>
@@ -8273,7 +8230,7 @@
               <a:t>Ref 6:</a:t>
             </a:r>
             <a:r>
-              <a:rPr kumimoji="0" lang="en-US" altLang="en-US" sz="1200" b="0" i="0" u="none" strike="noStrike" cap="none" normalizeH="0" baseline="0" dirty="0">
+              <a:rPr kumimoji="0" lang="en-US" altLang="en-US" sz="1400" b="0" i="0" u="none" strike="noStrike" cap="none" normalizeH="0" baseline="0" dirty="0">
                 <a:ln>
                   <a:noFill/>
                 </a:ln>
@@ -8289,7 +8246,7 @@
               <a:t> Adewole D. B., Olusola S. J., Ogunlana S. O., and Adelola M. A. "Development of an AI-Powered Faculty Support Chatbot." </a:t>
             </a:r>
             <a:r>
-              <a:rPr kumimoji="0" lang="en-US" altLang="en-US" sz="1200" b="0" i="1" u="none" strike="noStrike" cap="none" normalizeH="0" baseline="0" dirty="0">
+              <a:rPr kumimoji="0" lang="en-US" altLang="en-US" sz="1400" b="0" i="1" u="none" strike="noStrike" cap="none" normalizeH="0" baseline="0" dirty="0">
                 <a:ln>
                   <a:noFill/>
                 </a:ln>
@@ -8305,7 +8262,7 @@
               <a:t>International Journal of Research and Innovation in Applied Science (IJRIAS)</a:t>
             </a:r>
             <a:r>
-              <a:rPr kumimoji="0" lang="en-US" altLang="en-US" sz="1200" b="0" i="0" u="none" strike="noStrike" cap="none" normalizeH="0" baseline="0" dirty="0">
+              <a:rPr kumimoji="0" lang="en-US" altLang="en-US" sz="1400" b="0" i="0" u="none" strike="noStrike" cap="none" normalizeH="0" baseline="0" dirty="0">
                 <a:ln>
                   <a:noFill/>
                 </a:ln>
@@ -8319,170 +8276,6 @@
                 <a:cs typeface="Times New Roman" panose="02020603050405020304" pitchFamily="18" charset="0"/>
               </a:rPr>
               <a:t>, Vol. X, Issue I, 2025.</a:t>
-            </a:r>
-          </a:p>
-          <a:p>
-            <a:pPr marL="171450" marR="0" lvl="0" indent="-171450" algn="just" defTabSz="914400" rtl="0" eaLnBrk="0" fontAlgn="base" latinLnBrk="0" hangingPunct="0">
-              <a:lnSpc>
-                <a:spcPct val="100000"/>
-              </a:lnSpc>
-              <a:spcBef>
-                <a:spcPct val="0"/>
-              </a:spcBef>
-              <a:spcAft>
-                <a:spcPct val="0"/>
-              </a:spcAft>
-              <a:buClrTx/>
-              <a:buSzTx/>
-              <a:buFont typeface="Wingdings" panose="05000000000000000000" pitchFamily="2" charset="2"/>
-              <a:buChar char="Ø"/>
-              <a:tabLst/>
-            </a:pPr>
-            <a:r>
-              <a:rPr kumimoji="0" lang="en-US" altLang="en-US" sz="1200" b="1" i="0" u="none" strike="noStrike" cap="none" normalizeH="0" baseline="0" dirty="0">
-                <a:ln>
-                  <a:noFill/>
-                </a:ln>
-                <a:solidFill>
-                  <a:schemeClr val="accent2">
-                    <a:lumMod val="50000"/>
-                  </a:schemeClr>
-                </a:solidFill>
-                <a:effectLst/>
-                <a:latin typeface="Times New Roman" panose="02020603050405020304" pitchFamily="18" charset="0"/>
-                <a:cs typeface="Times New Roman" panose="02020603050405020304" pitchFamily="18" charset="0"/>
-              </a:rPr>
-              <a:t>Ref 7:</a:t>
-            </a:r>
-            <a:r>
-              <a:rPr kumimoji="0" lang="en-US" altLang="en-US" sz="1200" b="0" i="0" u="none" strike="noStrike" cap="none" normalizeH="0" baseline="0" dirty="0">
-                <a:ln>
-                  <a:noFill/>
-                </a:ln>
-                <a:solidFill>
-                  <a:schemeClr val="accent2">
-                    <a:lumMod val="50000"/>
-                  </a:schemeClr>
-                </a:solidFill>
-                <a:effectLst/>
-                <a:latin typeface="Times New Roman" panose="02020603050405020304" pitchFamily="18" charset="0"/>
-                <a:cs typeface="Times New Roman" panose="02020603050405020304" pitchFamily="18" charset="0"/>
-              </a:rPr>
-              <a:t> "Predicting Practical Performance of the Student from C Code Submissions." </a:t>
-            </a:r>
-            <a:r>
-              <a:rPr kumimoji="0" lang="en-US" altLang="en-US" sz="1200" b="0" i="1" u="none" strike="noStrike" cap="none" normalizeH="0" baseline="0" dirty="0">
-                <a:ln>
-                  <a:noFill/>
-                </a:ln>
-                <a:solidFill>
-                  <a:schemeClr val="accent2">
-                    <a:lumMod val="50000"/>
-                  </a:schemeClr>
-                </a:solidFill>
-                <a:effectLst/>
-                <a:latin typeface="Times New Roman" panose="02020603050405020304" pitchFamily="18" charset="0"/>
-                <a:cs typeface="Times New Roman" panose="02020603050405020304" pitchFamily="18" charset="0"/>
-              </a:rPr>
-              <a:t>Naturalista Campano</a:t>
-            </a:r>
-            <a:r>
-              <a:rPr kumimoji="0" lang="en-US" altLang="en-US" sz="1200" b="0" i="0" u="none" strike="noStrike" cap="none" normalizeH="0" baseline="0" dirty="0">
-                <a:ln>
-                  <a:noFill/>
-                </a:ln>
-                <a:solidFill>
-                  <a:schemeClr val="accent2">
-                    <a:lumMod val="50000"/>
-                  </a:schemeClr>
-                </a:solidFill>
-                <a:effectLst/>
-                <a:latin typeface="Times New Roman" panose="02020603050405020304" pitchFamily="18" charset="0"/>
-                <a:cs typeface="Times New Roman" panose="02020603050405020304" pitchFamily="18" charset="0"/>
-              </a:rPr>
-              <a:t>, Vol. 1, Issue 1, 2025.</a:t>
-            </a:r>
-          </a:p>
-          <a:p>
-            <a:pPr marL="171450" marR="0" lvl="0" indent="-171450" algn="just" defTabSz="914400" rtl="0" eaLnBrk="0" fontAlgn="base" latinLnBrk="0" hangingPunct="0">
-              <a:lnSpc>
-                <a:spcPct val="100000"/>
-              </a:lnSpc>
-              <a:spcBef>
-                <a:spcPct val="0"/>
-              </a:spcBef>
-              <a:spcAft>
-                <a:spcPct val="0"/>
-              </a:spcAft>
-              <a:buClrTx/>
-              <a:buSzTx/>
-              <a:buFont typeface="Wingdings" panose="05000000000000000000" pitchFamily="2" charset="2"/>
-              <a:buChar char="Ø"/>
-              <a:tabLst/>
-            </a:pPr>
-            <a:r>
-              <a:rPr kumimoji="0" lang="en-US" altLang="en-US" sz="1200" b="1" i="0" u="none" strike="noStrike" cap="none" normalizeH="0" baseline="0" dirty="0">
-                <a:ln>
-                  <a:noFill/>
-                </a:ln>
-                <a:solidFill>
-                  <a:schemeClr val="accent2">
-                    <a:lumMod val="50000"/>
-                  </a:schemeClr>
-                </a:solidFill>
-                <a:effectLst/>
-                <a:latin typeface="Times New Roman" panose="02020603050405020304" pitchFamily="18" charset="0"/>
-                <a:cs typeface="Times New Roman" panose="02020603050405020304" pitchFamily="18" charset="0"/>
-              </a:rPr>
-              <a:t>Ref 8:</a:t>
-            </a:r>
-            <a:r>
-              <a:rPr kumimoji="0" lang="en-US" altLang="en-US" sz="1200" b="0" i="0" u="none" strike="noStrike" cap="none" normalizeH="0" baseline="0" dirty="0">
-                <a:ln>
-                  <a:noFill/>
-                </a:ln>
-                <a:solidFill>
-                  <a:schemeClr val="accent2">
-                    <a:lumMod val="50000"/>
-                  </a:schemeClr>
-                </a:solidFill>
-                <a:effectLst/>
-                <a:latin typeface="Times New Roman" panose="02020603050405020304" pitchFamily="18" charset="0"/>
-                <a:cs typeface="Times New Roman" panose="02020603050405020304" pitchFamily="18" charset="0"/>
-              </a:rPr>
-              <a:t> "Ai Based Platform For Student (Ai Chatbot, Ai Attendance) Using NLP and K-N-N Algorithm." </a:t>
-            </a:r>
-            <a:r>
-              <a:rPr kumimoji="0" lang="en-US" altLang="en-US" sz="1200" b="0" i="1" u="none" strike="noStrike" cap="none" normalizeH="0" baseline="0" dirty="0">
-                <a:ln>
-                  <a:noFill/>
-                </a:ln>
-                <a:solidFill>
-                  <a:schemeClr val="accent2">
-                    <a:lumMod val="50000"/>
-                  </a:schemeClr>
-                </a:solidFill>
-                <a:effectLst/>
-                <a:latin typeface="Times New Roman" panose="02020603050405020304" pitchFamily="18" charset="0"/>
-                <a:cs typeface="Times New Roman" panose="02020603050405020304" pitchFamily="18" charset="0"/>
-              </a:rPr>
-              <a:t>International Journal for Science and Advance Research In Technology (IJSART)</a:t>
-            </a:r>
-            <a:r>
-              <a:rPr kumimoji="0" lang="en-US" altLang="en-US" sz="1200" b="0" i="0" u="none" strike="noStrike" cap="none" normalizeH="0" baseline="0" dirty="0">
-                <a:ln>
-                  <a:noFill/>
-                </a:ln>
-                <a:solidFill>
-                  <a:schemeClr val="accent2">
-                    <a:lumMod val="50000"/>
-                  </a:schemeClr>
-                </a:solidFill>
-                <a:effectLst/>
-                <a:latin typeface="Times New Roman" panose="02020603050405020304" pitchFamily="18" charset="0"/>
-                <a:cs typeface="Times New Roman" panose="02020603050405020304" pitchFamily="18" charset="0"/>
-              </a:rPr>
-              <a:t>, 2023.</a:t>
             </a:r>
           </a:p>
         </p:txBody>
@@ -9467,55 +9260,7 @@
                 <a:latin typeface="Times New Roman" panose="02020603050405020304" pitchFamily="18" charset="0"/>
                 <a:cs typeface="Times New Roman" panose="02020603050405020304" pitchFamily="18" charset="0"/>
               </a:rPr>
-              <a:t>, an integrated multi-role ecosystem (Admin, Faculty, Student) designed to modernize institutional administration and enhance student engagement. The system enables seamless attendance automation through a </a:t>
-            </a:r>
-            <a:r>
-              <a:rPr lang="en-GB" sz="1600" b="1" dirty="0">
-                <a:solidFill>
-                  <a:schemeClr val="accent2">
-                    <a:lumMod val="50000"/>
-                  </a:schemeClr>
-                </a:solidFill>
-                <a:latin typeface="Times New Roman" panose="02020603050405020304" pitchFamily="18" charset="0"/>
-                <a:cs typeface="Times New Roman" panose="02020603050405020304" pitchFamily="18" charset="0"/>
-              </a:rPr>
-              <a:t>triple-mode approach</a:t>
-            </a:r>
-            <a:r>
-              <a:rPr lang="en-GB" sz="1600" dirty="0">
-                <a:solidFill>
-                  <a:schemeClr val="accent2">
-                    <a:lumMod val="50000"/>
-                  </a:schemeClr>
-                </a:solidFill>
-                <a:latin typeface="Times New Roman" panose="02020603050405020304" pitchFamily="18" charset="0"/>
-                <a:cs typeface="Times New Roman" panose="02020603050405020304" pitchFamily="18" charset="0"/>
-              </a:rPr>
-              <a:t>—incorporating QR scanning, traditional manual entries, and a </a:t>
-            </a:r>
-            <a:r>
-              <a:rPr lang="en-GB" sz="1600" b="1" dirty="0">
-                <a:solidFill>
-                  <a:schemeClr val="accent2">
-                    <a:lumMod val="50000"/>
-                  </a:schemeClr>
-                </a:solidFill>
-                <a:latin typeface="Times New Roman" panose="02020603050405020304" pitchFamily="18" charset="0"/>
-                <a:cs typeface="Times New Roman" panose="02020603050405020304" pitchFamily="18" charset="0"/>
-              </a:rPr>
-              <a:t>Natural Language Processing (NLP) chatbot</a:t>
-            </a:r>
-            <a:r>
-              <a:rPr lang="en-GB" sz="1600" dirty="0">
-                <a:solidFill>
-                  <a:schemeClr val="accent2">
-                    <a:lumMod val="50000"/>
-                  </a:schemeClr>
-                </a:solidFill>
-                <a:latin typeface="Times New Roman" panose="02020603050405020304" pitchFamily="18" charset="0"/>
-                <a:cs typeface="Times New Roman" panose="02020603050405020304" pitchFamily="18" charset="0"/>
-              </a:rPr>
-              <a:t> for conversational bulk attendance marking. Beyond administrative tracking, SIMES integrates a </a:t>
+              <a:t>, an integrated multi-role ecosystem (Admin, Faculty, Student) designed to modernize institutional administration and enhance student engagement. The system enables seamless attendance automation through a dual-mode approach—incorporating dynamic QR scanning and digital manual entries for maximum flexibility. Beyond administrative tracking, SIMES integrates a </a:t>
             </a:r>
             <a:r>
               <a:rPr lang="en-GB" sz="1600" b="1" dirty="0">
@@ -11015,7 +10760,7 @@
               <a:tabLst/>
             </a:pPr>
             <a:r>
-              <a:rPr kumimoji="0" lang="en-US" altLang="en-US" sz="1300" b="1" i="0" u="none" strike="noStrike" cap="none" normalizeH="0" baseline="0" dirty="0">
+              <a:rPr kumimoji="0" lang="en-GB" altLang="en-US" sz="1300" b="1" i="0" u="none" strike="noStrike" cap="none" normalizeH="0" baseline="0" dirty="0">
                 <a:ln>
                   <a:noFill/>
                 </a:ln>
@@ -11028,10 +10773,10 @@
                 <a:latin typeface="Times New Roman" panose="02020603050405020304" pitchFamily="18" charset="0"/>
                 <a:cs typeface="Times New Roman" panose="02020603050405020304" pitchFamily="18" charset="0"/>
               </a:rPr>
-              <a:t>Hybrid Attendance Engine</a:t>
-            </a:r>
-            <a:r>
-              <a:rPr kumimoji="0" lang="en-US" altLang="en-US" sz="1300" b="0" i="0" u="none" strike="noStrike" cap="none" normalizeH="0" baseline="0" dirty="0">
+              <a:t>Hybrid Attendance Engine: </a:t>
+            </a:r>
+            <a:r>
+              <a:rPr kumimoji="0" lang="en-GB" altLang="en-US" sz="1300" i="0" u="none" strike="noStrike" cap="none" normalizeH="0" baseline="0" dirty="0">
                 <a:ln>
                   <a:noFill/>
                 </a:ln>
@@ -11044,39 +10789,7 @@
                 <a:latin typeface="Times New Roman" panose="02020603050405020304" pitchFamily="18" charset="0"/>
                 <a:cs typeface="Times New Roman" panose="02020603050405020304" pitchFamily="18" charset="0"/>
               </a:rPr>
-              <a:t>: Implementing QR scanning for speed, manual entry for flexibility, and an </a:t>
-            </a:r>
-            <a:r>
-              <a:rPr kumimoji="0" lang="en-US" altLang="en-US" sz="1300" b="1" i="0" u="none" strike="noStrike" cap="none" normalizeH="0" baseline="0" dirty="0">
-                <a:ln>
-                  <a:noFill/>
-                </a:ln>
-                <a:solidFill>
-                  <a:schemeClr val="accent2">
-                    <a:lumMod val="50000"/>
-                  </a:schemeClr>
-                </a:solidFill>
-                <a:effectLst/>
-                <a:latin typeface="Times New Roman" panose="02020603050405020304" pitchFamily="18" charset="0"/>
-                <a:cs typeface="Times New Roman" panose="02020603050405020304" pitchFamily="18" charset="0"/>
-              </a:rPr>
-              <a:t>NLP Chatbot</a:t>
-            </a:r>
-            <a:r>
-              <a:rPr kumimoji="0" lang="en-US" altLang="en-US" sz="1300" b="0" i="0" u="none" strike="noStrike" cap="none" normalizeH="0" baseline="0" dirty="0">
-                <a:ln>
-                  <a:noFill/>
-                </a:ln>
-                <a:solidFill>
-                  <a:schemeClr val="accent2">
-                    <a:lumMod val="50000"/>
-                  </a:schemeClr>
-                </a:solidFill>
-                <a:effectLst/>
-                <a:latin typeface="Times New Roman" panose="02020603050405020304" pitchFamily="18" charset="0"/>
-                <a:cs typeface="Times New Roman" panose="02020603050405020304" pitchFamily="18" charset="0"/>
-              </a:rPr>
-              <a:t> for efficient text-based bulk marking (e.g., "Roll X absent, others present").</a:t>
+              <a:t>Implementing QR scanning for high-speed logging and a streamlined manual interface for faculty to handle exceptions and bulk attendance adjustments.</a:t>
             </a:r>
           </a:p>
           <a:p>
@@ -11096,7 +10809,7 @@
               <a:buChar char="Ø"/>
               <a:tabLst/>
             </a:pPr>
-            <a:endParaRPr kumimoji="0" lang="en-US" altLang="en-US" sz="1300" b="0" i="0" u="none" strike="noStrike" cap="none" normalizeH="0" baseline="0" dirty="0">
+            <a:endParaRPr kumimoji="0" lang="en-GB" altLang="en-US" sz="1300" i="0" u="none" strike="noStrike" cap="none" normalizeH="0" baseline="0" dirty="0">
               <a:ln>
                 <a:noFill/>
               </a:ln>
@@ -11966,7 +11679,7 @@
               <a:tabLst/>
             </a:pPr>
             <a:r>
-              <a:rPr kumimoji="0" lang="en-US" altLang="en-US" sz="1600" b="0" i="0" u="none" strike="noStrike" cap="none" normalizeH="0" baseline="0" dirty="0">
+              <a:rPr kumimoji="0" lang="en-GB" altLang="en-US" sz="1600" b="0" i="0" u="none" strike="noStrike" cap="none" normalizeH="0" baseline="0" dirty="0">
                 <a:ln>
                   <a:noFill/>
                 </a:ln>
@@ -11979,7 +11692,7 @@
                 <a:latin typeface="Times New Roman" panose="02020603050405020304" pitchFamily="18" charset="0"/>
                 <a:cs typeface="Times New Roman" panose="02020603050405020304" pitchFamily="18" charset="0"/>
               </a:rPr>
-              <a:t>To implement an NLP-based assistant for faculty to handle attendance corrections and bulk entries effortlessly.</a:t>
+              <a:t>To develop a real-time synchronization engine that maps student attendance directly to the Master Timetable to ensure 100% data accuracy.</a:t>
             </a:r>
           </a:p>
           <a:p>
@@ -12270,8 +11983,8 @@
         </p:nvSpPr>
         <p:spPr bwMode="auto">
           <a:xfrm rot="10800000" flipV="1">
-            <a:off x="66039" y="1294477"/>
-            <a:ext cx="8982167" cy="2554545"/>
+            <a:off x="66039" y="1417588"/>
+            <a:ext cx="8982167" cy="2308324"/>
           </a:xfrm>
           <a:prstGeom prst="rect">
             <a:avLst/>
@@ -12336,7 +12049,7 @@
               <a:tabLst/>
             </a:pPr>
             <a:r>
-              <a:rPr kumimoji="0" lang="en-US" altLang="en-US" sz="1600" b="1" i="0" u="none" strike="noStrike" cap="none" normalizeH="0" baseline="0" dirty="0">
+              <a:rPr kumimoji="0" lang="en-GB" altLang="en-US" sz="1600" i="0" u="none" strike="noStrike" cap="none" normalizeH="0" baseline="0" dirty="0">
                 <a:ln>
                   <a:noFill/>
                 </a:ln>
@@ -12349,23 +12062,7 @@
                 <a:latin typeface="Times New Roman" panose="02020603050405020304" pitchFamily="18" charset="0"/>
                 <a:cs typeface="Times New Roman" panose="02020603050405020304" pitchFamily="18" charset="0"/>
               </a:rPr>
-              <a:t>NLP Command Accuracy</a:t>
-            </a:r>
-            <a:r>
-              <a:rPr kumimoji="0" lang="en-US" altLang="en-US" sz="1600" b="0" i="0" u="none" strike="noStrike" cap="none" normalizeH="0" baseline="0" dirty="0">
-                <a:ln>
-                  <a:noFill/>
-                </a:ln>
-                <a:solidFill>
-                  <a:schemeClr val="accent2">
-                    <a:lumMod val="50000"/>
-                  </a:schemeClr>
-                </a:solidFill>
-                <a:effectLst/>
-                <a:latin typeface="Times New Roman" panose="02020603050405020304" pitchFamily="18" charset="0"/>
-                <a:cs typeface="Times New Roman" panose="02020603050405020304" pitchFamily="18" charset="0"/>
-              </a:rPr>
-              <a:t>: Testing the text-parser's ability to identify roll numbers and intents across various sentence structures.</a:t>
+              <a:t>Testing the system’s ability to handle multiple simultaneous QR scans without data collisions.</a:t>
             </a:r>
           </a:p>
           <a:p>
@@ -12385,7 +12082,7 @@
               <a:buChar char="Ø"/>
               <a:tabLst/>
             </a:pPr>
-            <a:endParaRPr kumimoji="0" lang="en-US" altLang="en-US" sz="1600" b="0" i="0" u="none" strike="noStrike" cap="none" normalizeH="0" baseline="0" dirty="0">
+            <a:endParaRPr kumimoji="0" lang="en-US" altLang="en-US" sz="1600" i="0" u="none" strike="noStrike" cap="none" normalizeH="0" baseline="0" dirty="0">
               <a:ln>
                 <a:noFill/>
               </a:ln>
